--- a/sales/templates/proasiste-pitch-deck.pptx
+++ b/sales/templates/proasiste-pitch-deck.pptx
@@ -587,7 +587,7 @@
             </a:pPr>
             <a:r>
               <a:rPr/>
-              <a:t>Nod along with the pain — owners live this every day. If {{Pain Point}} came up on the discovery call, name it: "you told me {{Pain Point}} — that's exactly slide two." The "walks out the door" line hits hardest with anyone who's lost a key employee.</a:t>
+              <a:t>Nod along with the pain. Owners live this every day. If {{Pain Point}} came up on the discovery call, name it: "you told me {{Pain Point}}, that's exactly slide two." The "walks out the door" line hits hardest with anyone who's lost a key employee.</a:t>
             </a:r>
           </a:p>
         </p:txBody>
@@ -669,7 +669,7 @@
             </a:pPr>
             <a:r>
               <a:rPr/>
-              <a:t>This is the aha. Pause here. It's a different mental model than project management — not another tool your team has to update, a twin that already knows. Let it land before moving on.</a:t>
+              <a:t>This is the aha. Pause here. It's a different mental model than project management. This isn't another tool your team has to update, it's a twin that already knows. Let it land before moving on.</a:t>
             </a:r>
           </a:p>
         </p:txBody>
@@ -751,7 +751,7 @@
             </a:pPr>
             <a:r>
               <a:rPr/>
-              <a:t>These are the two features that close the sale. Demo them live if you can — the live answer to "where do things stand" is the moment they lean in. For owners holding too much in their head and on sticky notes, the one-sentence delegation sells itself.</a:t>
+              <a:t>These are the two features that close the sale. Demo them live if you can. The live answer to "where do things stand" is the moment they lean in. For owners holding too much in their head and on sticky notes, the one-sentence delegation sells itself.</a:t>
             </a:r>
           </a:p>
         </p:txBody>
@@ -915,7 +915,7 @@
             </a:pPr>
             <a:r>
               <a:rPr/>
-              <a:t>This converts owners who worry their team will see twins as spyware. Visibility with transparency is the whole pitch — you get oversight, they get to see it's not secret. Don't skip it for cautious teams.</a:t>
+              <a:t>This converts owners who worry their team will see twins as spyware. Visibility with transparency is the whole pitch: you get oversight, they get to see it's not secret. Don't skip it for cautious teams.</a:t>
             </a:r>
           </a:p>
         </p:txBody>
@@ -997,7 +997,7 @@
             </a:pPr>
             <a:r>
               <a:rPr/>
-              <a:t>Shows momentum and creates FOMO for early adopters. Tie one item to {{Company}}'s situation — if they work closely with an accountant, lead with guest seats.</a:t>
+              <a:t>Shows momentum and creates FOMO for early adopters. Tie one item to {{Company}}'s situation. If they work closely with an accountant, lead with guest seats.</a:t>
             </a:r>
           </a:p>
         </p:txBody>
@@ -1079,7 +1079,7 @@
             </a:pPr>
             <a:r>
               <a:rPr/>
-              <a:t>Frame it as a low-risk pilot, not a platform migration. The trial sells itself the first time the twin answers a question that would have cost a meeting. Close on the demo — confirm {{Demo Date}} before you leave the room. Leave {{Prospect Name}} your details: {{Rep Name}} / {{Rep Email}}.</a:t>
+              <a:t>Frame it as a low-risk pilot, not a platform migration. The trial sells itself the first time the twin answers a question that would have cost a meeting. Close on the demo: confirm {{Demo Date}} before you leave the room. Leave {{Prospect Name}} your details: {{Rep Name}} / {{Rep Email}}.</a:t>
             </a:r>
           </a:p>
         </p:txBody>
@@ -4727,7 +4727,7 @@
             </a:pPr>
             <a:r>
               <a:rPr/>
-              <a:t>ProAsiste — Pitch Deck</a:t>
+              <a:t>ProAsiste: Pitch Deck</a:t>
             </a:r>
           </a:p>
         </p:txBody>
@@ -4825,7 +4825,7 @@
             <a:pPr lvl="0"/>
             <a:r>
               <a:rPr/>
-              <a:t>Free trial on the {{Tier}} plan — no credit card</a:t>
+              <a:t>Free trial on the {{Tier}} plan, no credit card</a:t>
             </a:r>
           </a:p>
           <a:p>
@@ -4893,11 +4893,11 @@
             </a:pPr>
             <a:r>
               <a:rPr sz="2000" b="1"/>
-              <a:t>HOW TO USE THIS TEMPLATE</a:t>
+              <a:t>HOW TO USE THIS TEMPLATE.</a:t>
             </a:r>
             <a:r>
               <a:rPr sz="2000"/>
-              <a:t> — 1. </a:t>
+              <a:t> 1. </a:t>
             </a:r>
             <a:r>
               <a:rPr sz="2000" i="1"/>
@@ -4981,7 +4981,7 @@
             </a:pPr>
             <a:r>
               <a:rPr/>
-              <a:t>When's the last time you knew — without a meeting — what every person on your team was working on?</a:t>
+              <a:t>When's the last time you knew, without a meeting, what every person on your team was working on?</a:t>
             </a:r>
           </a:p>
         </p:txBody>
@@ -5088,7 +5088,7 @@
             <a:pPr lvl="0"/>
             <a:r>
               <a:rPr/>
-              <a:t>Knowledge lives in people's heads — and walks out the door when they leave</a:t>
+              <a:t>Knowledge lives in people's heads, and walks out the door when they leave</a:t>
             </a:r>
           </a:p>
           <a:p>
@@ -5149,7 +5149,7 @@
             </a:pPr>
             <a:r>
               <a:rPr/>
-              <a:t>What if every person on your team had their own AI twin — and you had an owner twin too?</a:t>
+              <a:t>What if every person on your team had their own AI twin, and you had an owner twin too?</a:t>
             </a:r>
           </a:p>
         </p:txBody>
@@ -5186,7 +5186,7 @@
             <a:pPr lvl="0"/>
             <a:r>
               <a:rPr/>
-              <a:t>This is ProAsiste — a daily standup that writes itself.</a:t>
+              <a:t>This is ProAsiste: a daily standup that writes itself.</a:t>
             </a:r>
           </a:p>
         </p:txBody>
@@ -5256,14 +5256,14 @@
             <a:pPr lvl="0"/>
             <a:r>
               <a:rPr/>
-              <a:t>See what your team handled today — ask your twin "Where do the Q3 installs stand?" Live answer, pulled from your team's twins. No status meeting.</a:t>
+              <a:t>See what your team handled today. Ask your twin "Where do the Q3 installs stand?" Live answer, pulled from your team's twins. No status meeting.</a:t>
             </a:r>
           </a:p>
           <a:p>
             <a:pPr lvl="0"/>
             <a:r>
               <a:rPr/>
-              <a:t>Delegate in one sentence — type "have Maria follow up on the Henderson quote by Friday" and it lands in her twin's chat, tracked back to yours.</a:t>
+              <a:t>Delegate in one sentence. Type "have Maria follow up on the Henderson quote by Friday" and it lands in her twin's chat, tracked back to yours.</a:t>
             </a:r>
           </a:p>
         </p:txBody>
@@ -5333,14 +5333,14 @@
             <a:pPr lvl="0"/>
             <a:r>
               <a:rPr/>
-              <a:t>Day-one context for new hires — every conversation, fact, and filed doc feeds a shared knowledge graph; new hires get years of context on day one without asking anyone.</a:t>
+              <a:t>Day-one context for new hires: every conversation, fact, and filed doc feeds a shared knowledge graph; new hires get years of context on day one without asking anyone.</a:t>
             </a:r>
           </a:p>
           <a:p>
             <a:pPr lvl="0"/>
             <a:r>
               <a:rPr/>
-              <a:t>Goals the whole team moves — set "$75K recurring by Q4," every team member's progress rolls up into the bar automatically.</a:t>
+              <a:t>Goals the whole team moves: set "$75K recurring by Q4," every team member's progress rolls up into the bar automatically.</a:t>
             </a:r>
           </a:p>
         </p:txBody>
@@ -5417,7 +5417,7 @@
             <a:pPr lvl="0"/>
             <a:r>
               <a:rPr/>
-              <a:t>Everyone sees who can see what — no black-box surveillance</a:t>
+              <a:t>Everyone sees who can see what, with no black-box surveillance</a:t>
             </a:r>
           </a:p>
           <a:p>

--- a/sales/templates/proasiste-pitch-deck.pptx
+++ b/sales/templates/proasiste-pitch-deck.pptx
@@ -7,6 +7,18 @@
   <p:notesMasterIdLst>
     <p:notesMasterId r:id="rId12"/>
   </p:notesMasterIdLst>
+  <p:sldIdLst>
+    <p:sldId id="256" r:id="rId2"/>
+    <p:sldId id="257" r:id="rId3"/>
+    <p:sldId id="258" r:id="rId4"/>
+    <p:sldId id="259" r:id="rId5"/>
+    <p:sldId id="260" r:id="rId6"/>
+    <p:sldId id="261" r:id="rId7"/>
+    <p:sldId id="262" r:id="rId8"/>
+    <p:sldId id="263" r:id="rId9"/>
+    <p:sldId id="264" r:id="rId10"/>
+    <p:sldId id="265" r:id="rId11"/>
+  </p:sldIdLst>
   <p:sldSz cx="12191695" cy="6858000" type="screen4x3"/>
   <p:notesSz cx="6858000" cy="9144000"/>
   <p:defaultTextStyle>
